--- a/yaa-decks/Madd-Yaa-Small-Quranic.pptx
+++ b/yaa-decks/Madd-Yaa-Small-Quranic.pptx
@@ -4,6 +4,9 @@
   <p:sldMasterIdLst>
     <p:sldMasterId id="2147483648" r:id="rId1"/>
   </p:sldMasterIdLst>
+  <p:notesMasterIdLst>
+    <p:notesMasterId r:id="rId14"/>
+  </p:notesMasterIdLst>
   <p:sldIdLst>
     <p:sldId id="256" r:id="rId2"/>
     <p:sldId id="257" r:id="rId3"/>
@@ -18,9 +21,6 @@
     <p:sldId id="266" r:id="rId12"/>
     <p:sldId id="267" r:id="rId13"/>
   </p:sldIdLst>
-  <p:notesMasterIdLst>
-    <p:notesMasterId r:id="rId14"/>
-  </p:notesMasterIdLst>
   <p:sldSz cx="9144000" cy="5143500"/>
   <p:notesSz cx="5143500" cy="9144000"/>
   <p:defaultTextStyle>
@@ -2761,9 +2761,6 @@
               </a:rPr>
               <a:t>بِهِ</a:t>
             </a:r>
-            <a:pPr algn="ctr" indent="0" marL="0">
-              <a:buNone/>
-            </a:pPr>
             <a:r>
               <a:rPr lang="ar-SA" altLang="en-US" sz="13500" dirty="0">
                 <a:solidFill>
@@ -4310,9 +4307,6 @@
               </a:rPr>
               <a:t>عِلْمِهِ</a:t>
             </a:r>
-            <a:pPr algn="ctr" indent="0" marL="0">
-              <a:buNone/>
-            </a:pPr>
             <a:r>
               <a:rPr lang="ar-SA" altLang="en-US" sz="9300" dirty="0">
                 <a:solidFill>
@@ -6021,9 +6015,6 @@
               </a:rPr>
               <a:t>حَمْدِهِ</a:t>
             </a:r>
-            <a:pPr algn="ctr" indent="0" marL="0">
-              <a:buNone/>
-            </a:pPr>
             <a:r>
               <a:rPr lang="ar-SA" altLang="en-US" sz="9300" dirty="0">
                 <a:solidFill>
@@ -7732,9 +7723,6 @@
               </a:rPr>
               <a:t>إِذْنِهِ</a:t>
             </a:r>
-            <a:pPr algn="ctr" indent="0" marL="0">
-              <a:buNone/>
-            </a:pPr>
             <a:r>
               <a:rPr lang="ar-SA" altLang="en-US" sz="9300" dirty="0">
                 <a:solidFill>
@@ -9443,9 +9431,6 @@
               </a:rPr>
               <a:t>رَبِّهِ</a:t>
             </a:r>
-            <a:pPr algn="ctr" indent="0" marL="0">
-              <a:buNone/>
-            </a:pPr>
             <a:r>
               <a:rPr lang="ar-SA" altLang="en-US" sz="9300" dirty="0">
                 <a:solidFill>
@@ -11154,9 +11139,6 @@
               </a:rPr>
               <a:t>نَفْسِهِ</a:t>
             </a:r>
-            <a:pPr algn="ctr" indent="0" marL="0">
-              <a:buNone/>
-            </a:pPr>
             <a:r>
               <a:rPr lang="ar-SA" altLang="en-US" sz="9300" dirty="0">
                 <a:solidFill>
@@ -12865,9 +12847,6 @@
               </a:rPr>
               <a:t>قَلْبِهِ</a:t>
             </a:r>
-            <a:pPr algn="ctr" indent="0" marL="0">
-              <a:buNone/>
-            </a:pPr>
             <a:r>
               <a:rPr lang="ar-SA" altLang="en-US" sz="9300" dirty="0">
                 <a:solidFill>
@@ -14576,9 +14555,6 @@
               </a:rPr>
               <a:t>أَمْرِهِ</a:t>
             </a:r>
-            <a:pPr algn="ctr" indent="0" marL="0">
-              <a:buNone/>
-            </a:pPr>
             <a:r>
               <a:rPr lang="ar-SA" altLang="en-US" sz="9300" dirty="0">
                 <a:solidFill>
@@ -16287,9 +16263,6 @@
               </a:rPr>
               <a:t>قَوْمِهِ</a:t>
             </a:r>
-            <a:pPr algn="ctr" indent="0" marL="0">
-              <a:buNone/>
-            </a:pPr>
             <a:r>
               <a:rPr lang="ar-SA" altLang="en-US" sz="9300" dirty="0">
                 <a:solidFill>
@@ -17998,9 +17971,6 @@
               </a:rPr>
               <a:t>أَهْلِهِ</a:t>
             </a:r>
-            <a:pPr algn="ctr" indent="0" marL="0">
-              <a:buNone/>
-            </a:pPr>
             <a:r>
               <a:rPr lang="ar-SA" altLang="en-US" sz="9300" dirty="0">
                 <a:solidFill>
@@ -19709,9 +19679,6 @@
               </a:rPr>
               <a:t>مِثْلِهِ</a:t>
             </a:r>
-            <a:pPr algn="ctr" indent="0" marL="0">
-              <a:buNone/>
-            </a:pPr>
             <a:r>
               <a:rPr lang="ar-SA" altLang="en-US" sz="9300" dirty="0">
                 <a:solidFill>
@@ -21420,9 +21387,6 @@
               </a:rPr>
               <a:t>عَبْدِهِ</a:t>
             </a:r>
-            <a:pPr algn="ctr" indent="0" marL="0">
-              <a:buNone/>
-            </a:pPr>
             <a:r>
               <a:rPr lang="ar-SA" altLang="en-US" sz="9300" dirty="0">
                 <a:solidFill>
